--- a/Slides/Semana 3/semana_3_slides.pptx
+++ b/Slides/Semana 3/semana_3_slides.pptx
@@ -874,7 +874,15 @@
           <a:p>
             <a:r>
               <a:rPr lang="en-US" dirty="0"/>
-              <a:t/>
+              <a:t>FIGURA A PRODUZIR (nota do apresentador — não aparece no slide)
+Objetivo didático:
+Mostrar a correspondência entre superestado/subestado e a sub-state machine do Animator.
+Arquivo sugerido:
+assets/animator-hfsm-guarda.webp
+Descrição:
+Captura de tela do Animator Controller com uma sub-state machine "Combate" contendo os estados "Atirar" e "Recarregar", e uma transição saindo da borda da sub-state machine para "Fugir".
+Como produzir:
+Screenshot direto do editor Unity durante a demonstração ao vivo, com anotações simples adicionadas no Krita.</a:t>
             </a:r>
             <a:endParaRPr lang="en-US" dirty="0"/>
           </a:p>

--- a/Slides/Semana 3/semana_3_slides.pptx
+++ b/Slides/Semana 3/semana_3_slides.pptx
@@ -24,11 +24,9 @@
     <p:sldId id="272" r:id="rId18"/>
     <p:sldId id="273" r:id="rId19"/>
     <p:sldId id="274" r:id="rId20"/>
-    <p:sldId id="275" r:id="rId21"/>
-    <p:sldId id="276" r:id="rId22"/>
   </p:sldIdLst>
   <p:notesMasterIdLst>
-    <p:notesMasterId r:id="rId23"/>
+    <p:notesMasterId r:id="rId21"/>
   </p:notesMasterIdLst>
   <p:sldSz cx="12192000" cy="6858000"/>
   <p:notesSz cx="6858000" cy="12192000"/>
@@ -874,15 +872,7 @@
           <a:p>
             <a:r>
               <a:rPr lang="en-US" dirty="0"/>
-              <a:t>FIGURA A PRODUZIR (nota do apresentador — não aparece no slide)
-Objetivo didático:
-Mostrar a correspondência entre superestado/subestado e a sub-state machine do Animator.
-Arquivo sugerido:
-assets/animator-hfsm-guarda.webp
-Descrição:
-Captura de tela do Animator Controller com uma sub-state machine "Combate" contendo os estados "Atirar" e "Recarregar", e uma transição saindo da borda da sub-state machine para "Fugir".
-Como produzir:
-Screenshot direto do editor Unity durante a demonstração ao vivo, com anotações simples adicionadas no Krita.</a:t>
+              <a:t/>
             </a:r>
             <a:endParaRPr lang="en-US" dirty="0"/>
           </a:p>
@@ -1540,7 +1530,7 @@
 </p:notes>
 </file>
 
-<file path=ppt/notesSlides/notesSlide20.xml><?xml version="1.0" encoding="utf-8"?>
+<file path=ppt/notesSlides/notesSlide3.xml><?xml version="1.0" encoding="utf-8"?>
 <p:notes xmlns:a="http://schemas.openxmlformats.org/drawingml/2006/main" xmlns:r="http://schemas.openxmlformats.org/officeDocument/2006/relationships" xmlns:p="http://schemas.openxmlformats.org/presentationml/2006/main">
   <p:cSld>
     <p:spTree>
@@ -1609,7 +1599,7 @@
           <a:p>
             <a:fld id="{F7021451-1387-4CA6-816F-3879F97B5CBC}" type="slidenum">
               <a:rPr lang="en-US"/>
-              <a:t>20</a:t>
+              <a:t>3</a:t>
             </a:fld>
             <a:endParaRPr lang="en-US"/>
           </a:p>
@@ -1628,7 +1618,7 @@
 </p:notes>
 </file>
 
-<file path=ppt/notesSlides/notesSlide21.xml><?xml version="1.0" encoding="utf-8"?>
+<file path=ppt/notesSlides/notesSlide4.xml><?xml version="1.0" encoding="utf-8"?>
 <p:notes xmlns:a="http://schemas.openxmlformats.org/drawingml/2006/main" xmlns:r="http://schemas.openxmlformats.org/officeDocument/2006/relationships" xmlns:p="http://schemas.openxmlformats.org/presentationml/2006/main">
   <p:cSld>
     <p:spTree>
@@ -1697,7 +1687,7 @@
           <a:p>
             <a:fld id="{F7021451-1387-4CA6-816F-3879F97B5CBC}" type="slidenum">
               <a:rPr lang="en-US"/>
-              <a:t>21</a:t>
+              <a:t>4</a:t>
             </a:fld>
             <a:endParaRPr lang="en-US"/>
           </a:p>
@@ -1716,7 +1706,7 @@
 </p:notes>
 </file>
 
-<file path=ppt/notesSlides/notesSlide3.xml><?xml version="1.0" encoding="utf-8"?>
+<file path=ppt/notesSlides/notesSlide5.xml><?xml version="1.0" encoding="utf-8"?>
 <p:notes xmlns:a="http://schemas.openxmlformats.org/drawingml/2006/main" xmlns:r="http://schemas.openxmlformats.org/officeDocument/2006/relationships" xmlns:p="http://schemas.openxmlformats.org/presentationml/2006/main">
   <p:cSld>
     <p:spTree>
@@ -1785,7 +1775,7 @@
           <a:p>
             <a:fld id="{F7021451-1387-4CA6-816F-3879F97B5CBC}" type="slidenum">
               <a:rPr lang="en-US"/>
-              <a:t>3</a:t>
+              <a:t>5</a:t>
             </a:fld>
             <a:endParaRPr lang="en-US"/>
           </a:p>
@@ -1804,7 +1794,7 @@
 </p:notes>
 </file>
 
-<file path=ppt/notesSlides/notesSlide4.xml><?xml version="1.0" encoding="utf-8"?>
+<file path=ppt/notesSlides/notesSlide6.xml><?xml version="1.0" encoding="utf-8"?>
 <p:notes xmlns:a="http://schemas.openxmlformats.org/drawingml/2006/main" xmlns:r="http://schemas.openxmlformats.org/officeDocument/2006/relationships" xmlns:p="http://schemas.openxmlformats.org/presentationml/2006/main">
   <p:cSld>
     <p:spTree>
@@ -1873,7 +1863,7 @@
           <a:p>
             <a:fld id="{F7021451-1387-4CA6-816F-3879F97B5CBC}" type="slidenum">
               <a:rPr lang="en-US"/>
-              <a:t>4</a:t>
+              <a:t>6</a:t>
             </a:fld>
             <a:endParaRPr lang="en-US"/>
           </a:p>
@@ -1892,7 +1882,7 @@
 </p:notes>
 </file>
 
-<file path=ppt/notesSlides/notesSlide5.xml><?xml version="1.0" encoding="utf-8"?>
+<file path=ppt/notesSlides/notesSlide7.xml><?xml version="1.0" encoding="utf-8"?>
 <p:notes xmlns:a="http://schemas.openxmlformats.org/drawingml/2006/main" xmlns:r="http://schemas.openxmlformats.org/officeDocument/2006/relationships" xmlns:p="http://schemas.openxmlformats.org/presentationml/2006/main">
   <p:cSld>
     <p:spTree>
@@ -1961,7 +1951,7 @@
           <a:p>
             <a:fld id="{F7021451-1387-4CA6-816F-3879F97B5CBC}" type="slidenum">
               <a:rPr lang="en-US"/>
-              <a:t>5</a:t>
+              <a:t>7</a:t>
             </a:fld>
             <a:endParaRPr lang="en-US"/>
           </a:p>
@@ -1980,182 +1970,6 @@
 </p:notes>
 </file>
 
-<file path=ppt/notesSlides/notesSlide6.xml><?xml version="1.0" encoding="utf-8"?>
-<p:notes xmlns:a="http://schemas.openxmlformats.org/drawingml/2006/main" xmlns:r="http://schemas.openxmlformats.org/officeDocument/2006/relationships" xmlns:p="http://schemas.openxmlformats.org/presentationml/2006/main">
-  <p:cSld>
-    <p:spTree>
-      <p:nvGrpSpPr>
-        <p:cNvPr id="1" name=""/>
-        <p:cNvGrpSpPr/>
-        <p:nvPr/>
-      </p:nvGrpSpPr>
-      <p:grpSpPr>
-        <a:xfrm>
-          <a:off x="0" y="0"/>
-          <a:ext cx="0" cy="0"/>
-          <a:chOff x="0" y="0"/>
-          <a:chExt cx="0" cy="0"/>
-        </a:xfrm>
-      </p:grpSpPr>
-      <p:sp>
-        <p:nvSpPr>
-          <p:cNvPr id="2" name="Slide Image Placeholder 1"/>
-          <p:cNvSpPr>
-            <a:spLocks noGrp="1" noRot="1" noChangeAspect="1"/>
-          </p:cNvSpPr>
-          <p:nvPr>
-            <p:ph type="sldImg"/>
-          </p:nvPr>
-        </p:nvSpPr>
-        <p:spPr/>
-      </p:sp>
-      <p:sp>
-        <p:nvSpPr>
-          <p:cNvPr id="3" name="Notes Placeholder 2"/>
-          <p:cNvSpPr>
-            <a:spLocks noGrp="1"/>
-          </p:cNvSpPr>
-          <p:nvPr>
-            <p:ph type="body" idx="1"/>
-          </p:nvPr>
-        </p:nvSpPr>
-        <p:spPr/>
-        <p:txBody>
-          <a:bodyPr/>
-          <a:lstStyle/>
-          <a:p>
-            <a:r>
-              <a:rPr lang="en-US" dirty="0"/>
-              <a:t/>
-            </a:r>
-            <a:endParaRPr lang="en-US" dirty="0"/>
-          </a:p>
-        </p:txBody>
-      </p:sp>
-      <p:sp>
-        <p:nvSpPr>
-          <p:cNvPr id="4" name="Slide Number Placeholder 3"/>
-          <p:cNvSpPr>
-            <a:spLocks noGrp="1"/>
-          </p:cNvSpPr>
-          <p:nvPr>
-            <p:ph type="sldNum" sz="quarter" idx="10"/>
-          </p:nvPr>
-        </p:nvSpPr>
-        <p:spPr/>
-        <p:txBody>
-          <a:bodyPr/>
-          <a:lstStyle/>
-          <a:p>
-            <a:fld id="{F7021451-1387-4CA6-816F-3879F97B5CBC}" type="slidenum">
-              <a:rPr lang="en-US"/>
-              <a:t>6</a:t>
-            </a:fld>
-            <a:endParaRPr lang="en-US"/>
-          </a:p>
-        </p:txBody>
-      </p:sp>
-    </p:spTree>
-    <p:extLst>
-      <p:ext uri="{BB962C8B-B14F-4D97-AF65-F5344CB8AC3E}">
-        <p14:creationId xmlns:p14="http://schemas.microsoft.com/office/powerpoint/2010/main" val="1024086991"/>
-      </p:ext>
-    </p:extLst>
-  </p:cSld>
-  <p:clrMapOvr>
-    <a:masterClrMapping/>
-  </p:clrMapOvr>
-</p:notes>
-</file>
-
-<file path=ppt/notesSlides/notesSlide7.xml><?xml version="1.0" encoding="utf-8"?>
-<p:notes xmlns:a="http://schemas.openxmlformats.org/drawingml/2006/main" xmlns:r="http://schemas.openxmlformats.org/officeDocument/2006/relationships" xmlns:p="http://schemas.openxmlformats.org/presentationml/2006/main">
-  <p:cSld>
-    <p:spTree>
-      <p:nvGrpSpPr>
-        <p:cNvPr id="1" name=""/>
-        <p:cNvGrpSpPr/>
-        <p:nvPr/>
-      </p:nvGrpSpPr>
-      <p:grpSpPr>
-        <a:xfrm>
-          <a:off x="0" y="0"/>
-          <a:ext cx="0" cy="0"/>
-          <a:chOff x="0" y="0"/>
-          <a:chExt cx="0" cy="0"/>
-        </a:xfrm>
-      </p:grpSpPr>
-      <p:sp>
-        <p:nvSpPr>
-          <p:cNvPr id="2" name="Slide Image Placeholder 1"/>
-          <p:cNvSpPr>
-            <a:spLocks noGrp="1" noRot="1" noChangeAspect="1"/>
-          </p:cNvSpPr>
-          <p:nvPr>
-            <p:ph type="sldImg"/>
-          </p:nvPr>
-        </p:nvSpPr>
-        <p:spPr/>
-      </p:sp>
-      <p:sp>
-        <p:nvSpPr>
-          <p:cNvPr id="3" name="Notes Placeholder 2"/>
-          <p:cNvSpPr>
-            <a:spLocks noGrp="1"/>
-          </p:cNvSpPr>
-          <p:nvPr>
-            <p:ph type="body" idx="1"/>
-          </p:nvPr>
-        </p:nvSpPr>
-        <p:spPr/>
-        <p:txBody>
-          <a:bodyPr/>
-          <a:lstStyle/>
-          <a:p>
-            <a:r>
-              <a:rPr lang="en-US" dirty="0"/>
-              <a:t/>
-            </a:r>
-            <a:endParaRPr lang="en-US" dirty="0"/>
-          </a:p>
-        </p:txBody>
-      </p:sp>
-      <p:sp>
-        <p:nvSpPr>
-          <p:cNvPr id="4" name="Slide Number Placeholder 3"/>
-          <p:cNvSpPr>
-            <a:spLocks noGrp="1"/>
-          </p:cNvSpPr>
-          <p:nvPr>
-            <p:ph type="sldNum" sz="quarter" idx="10"/>
-          </p:nvPr>
-        </p:nvSpPr>
-        <p:spPr/>
-        <p:txBody>
-          <a:bodyPr/>
-          <a:lstStyle/>
-          <a:p>
-            <a:fld id="{F7021451-1387-4CA6-816F-3879F97B5CBC}" type="slidenum">
-              <a:rPr lang="en-US"/>
-              <a:t>7</a:t>
-            </a:fld>
-            <a:endParaRPr lang="en-US"/>
-          </a:p>
-        </p:txBody>
-      </p:sp>
-    </p:spTree>
-    <p:extLst>
-      <p:ext uri="{BB962C8B-B14F-4D97-AF65-F5344CB8AC3E}">
-        <p14:creationId xmlns:p14="http://schemas.microsoft.com/office/powerpoint/2010/main" val="1024086991"/>
-      </p:ext>
-    </p:extLst>
-  </p:cSld>
-  <p:clrMapOvr>
-    <a:masterClrMapping/>
-  </p:clrMapOvr>
-</p:notes>
-</file>
-
 <file path=ppt/notesSlides/notesSlide8.xml><?xml version="1.0" encoding="utf-8"?>
 <p:notes xmlns:a="http://schemas.openxmlformats.org/drawingml/2006/main" xmlns:r="http://schemas.openxmlformats.org/officeDocument/2006/relationships" xmlns:p="http://schemas.openxmlformats.org/presentationml/2006/main">
   <p:cSld>
@@ -2202,7 +2016,15 @@
           <a:p>
             <a:r>
               <a:rPr lang="en-US" dirty="0"/>
-              <a:t/>
+              <a:t>FIGURA A PRODUZIR (nota do apresentador — não aparece no slide)
+Objetivo didático:
+Mostrar a estrutura do padrão State: interface IState, classes concretas de estado e o contexto (FSM) que mantém a referência ao estado ativo.
+Arquivo sugerido:
+assets/mermaid-1.png (substituir o diagrama atual, que ilustra os superestados da antiga Semana 3 — não usado mais nesta oferta)
+Descrição:
+Diagrama com uma interface IState no topo, três classes concretas apontando para ela (PatrulharState, AtacarState, FugirState) e uma classe FsmContext com uma seta para o estado ativo, indicando a delegação de Enter/Update/Exit.
+Como produzir:
+Gerar via Mermaid (classDiagram) e exportar como PNG, seguindo o padrão dos demais diagramas do curso.</a:t>
             </a:r>
             <a:endParaRPr lang="en-US" dirty="0"/>
           </a:p>
@@ -3071,84 +2893,6 @@
 <file path=ppt/slides/slide2.xml><?xml version="1.0" encoding="utf-8"?>
 <p:sld xmlns:a="http://schemas.openxmlformats.org/drawingml/2006/main" xmlns:r="http://schemas.openxmlformats.org/officeDocument/2006/relationships" xmlns:p="http://schemas.openxmlformats.org/presentationml/2006/main">
   <p:cSld name="Slide 2">
-    <p:bg>
-      <p:bgPr>
-        <a:blipFill dpi="0" rotWithShape="1">
-          <a:blip r:embed="rId1">
-            <a:lum/>
-          </a:blip>
-          <a:srcRect/>
-          <a:stretch>
-            <a:fillRect/>
-          </a:stretch>
-        </a:blipFill>
-        <a:effectLst/>
-      </p:bgPr>
-    </p:bg>
-    <p:spTree>
-      <p:nvGrpSpPr>
-        <p:cNvPr id="1" name=""/>
-        <p:cNvGrpSpPr/>
-        <p:nvPr/>
-      </p:nvGrpSpPr>
-      <p:grpSpPr>
-        <a:xfrm>
-          <a:off x="0" y="0"/>
-          <a:ext cx="0" cy="0"/>
-          <a:chOff x="0" y="0"/>
-          <a:chExt cx="0" cy="0"/>
-        </a:xfrm>
-      </p:grpSpPr>
-    </p:spTree>
-  </p:cSld>
-  <p:clrMapOvr>
-    <a:masterClrMapping/>
-  </p:clrMapOvr>
-</p:sld>
-</file>
-
-<file path=ppt/slides/slide20.xml><?xml version="1.0" encoding="utf-8"?>
-<p:sld xmlns:a="http://schemas.openxmlformats.org/drawingml/2006/main" xmlns:r="http://schemas.openxmlformats.org/officeDocument/2006/relationships" xmlns:p="http://schemas.openxmlformats.org/presentationml/2006/main">
-  <p:cSld name="Slide 20">
-    <p:bg>
-      <p:bgPr>
-        <a:blipFill dpi="0" rotWithShape="1">
-          <a:blip r:embed="rId1">
-            <a:lum/>
-          </a:blip>
-          <a:srcRect/>
-          <a:stretch>
-            <a:fillRect/>
-          </a:stretch>
-        </a:blipFill>
-        <a:effectLst/>
-      </p:bgPr>
-    </p:bg>
-    <p:spTree>
-      <p:nvGrpSpPr>
-        <p:cNvPr id="1" name=""/>
-        <p:cNvGrpSpPr/>
-        <p:nvPr/>
-      </p:nvGrpSpPr>
-      <p:grpSpPr>
-        <a:xfrm>
-          <a:off x="0" y="0"/>
-          <a:ext cx="0" cy="0"/>
-          <a:chOff x="0" y="0"/>
-          <a:chExt cx="0" cy="0"/>
-        </a:xfrm>
-      </p:grpSpPr>
-    </p:spTree>
-  </p:cSld>
-  <p:clrMapOvr>
-    <a:masterClrMapping/>
-  </p:clrMapOvr>
-</p:sld>
-</file>
-
-<file path=ppt/slides/slide21.xml><?xml version="1.0" encoding="utf-8"?>
-<p:sld xmlns:a="http://schemas.openxmlformats.org/drawingml/2006/main" xmlns:r="http://schemas.openxmlformats.org/officeDocument/2006/relationships" xmlns:p="http://schemas.openxmlformats.org/presentationml/2006/main">
-  <p:cSld name="Slide 21">
     <p:bg>
       <p:bgPr>
         <a:blipFill dpi="0" rotWithShape="1">

--- a/Slides/Semana 3/semana_3_slides.pptx
+++ b/Slides/Semana 3/semana_3_slides.pptx
@@ -24,9 +24,13 @@
     <p:sldId id="272" r:id="rId18"/>
     <p:sldId id="273" r:id="rId19"/>
     <p:sldId id="274" r:id="rId20"/>
+    <p:sldId id="275" r:id="rId21"/>
+    <p:sldId id="276" r:id="rId22"/>
+    <p:sldId id="277" r:id="rId23"/>
+    <p:sldId id="278" r:id="rId24"/>
   </p:sldIdLst>
   <p:notesMasterIdLst>
-    <p:notesMasterId r:id="rId21"/>
+    <p:notesMasterId r:id="rId25"/>
   </p:notesMasterIdLst>
   <p:sldSz cx="12192000" cy="6858000"/>
   <p:notesSz cx="6858000" cy="12192000"/>
@@ -1530,7 +1534,7 @@
 </p:notes>
 </file>
 
-<file path=ppt/notesSlides/notesSlide3.xml><?xml version="1.0" encoding="utf-8"?>
+<file path=ppt/notesSlides/notesSlide20.xml><?xml version="1.0" encoding="utf-8"?>
 <p:notes xmlns:a="http://schemas.openxmlformats.org/drawingml/2006/main" xmlns:r="http://schemas.openxmlformats.org/officeDocument/2006/relationships" xmlns:p="http://schemas.openxmlformats.org/presentationml/2006/main">
   <p:cSld>
     <p:spTree>
@@ -1599,7 +1603,7 @@
           <a:p>
             <a:fld id="{F7021451-1387-4CA6-816F-3879F97B5CBC}" type="slidenum">
               <a:rPr lang="en-US"/>
-              <a:t>3</a:t>
+              <a:t>20</a:t>
             </a:fld>
             <a:endParaRPr lang="en-US"/>
           </a:p>
@@ -1618,7 +1622,7 @@
 </p:notes>
 </file>
 
-<file path=ppt/notesSlides/notesSlide4.xml><?xml version="1.0" encoding="utf-8"?>
+<file path=ppt/notesSlides/notesSlide21.xml><?xml version="1.0" encoding="utf-8"?>
 <p:notes xmlns:a="http://schemas.openxmlformats.org/drawingml/2006/main" xmlns:r="http://schemas.openxmlformats.org/officeDocument/2006/relationships" xmlns:p="http://schemas.openxmlformats.org/presentationml/2006/main">
   <p:cSld>
     <p:spTree>
@@ -1687,7 +1691,7 @@
           <a:p>
             <a:fld id="{F7021451-1387-4CA6-816F-3879F97B5CBC}" type="slidenum">
               <a:rPr lang="en-US"/>
-              <a:t>4</a:t>
+              <a:t>21</a:t>
             </a:fld>
             <a:endParaRPr lang="en-US"/>
           </a:p>
@@ -1706,7 +1710,7 @@
 </p:notes>
 </file>
 
-<file path=ppt/notesSlides/notesSlide5.xml><?xml version="1.0" encoding="utf-8"?>
+<file path=ppt/notesSlides/notesSlide22.xml><?xml version="1.0" encoding="utf-8"?>
 <p:notes xmlns:a="http://schemas.openxmlformats.org/drawingml/2006/main" xmlns:r="http://schemas.openxmlformats.org/officeDocument/2006/relationships" xmlns:p="http://schemas.openxmlformats.org/presentationml/2006/main">
   <p:cSld>
     <p:spTree>
@@ -1775,7 +1779,7 @@
           <a:p>
             <a:fld id="{F7021451-1387-4CA6-816F-3879F97B5CBC}" type="slidenum">
               <a:rPr lang="en-US"/>
-              <a:t>5</a:t>
+              <a:t>22</a:t>
             </a:fld>
             <a:endParaRPr lang="en-US"/>
           </a:p>
@@ -1794,7 +1798,7 @@
 </p:notes>
 </file>
 
-<file path=ppt/notesSlides/notesSlide6.xml><?xml version="1.0" encoding="utf-8"?>
+<file path=ppt/notesSlides/notesSlide23.xml><?xml version="1.0" encoding="utf-8"?>
 <p:notes xmlns:a="http://schemas.openxmlformats.org/drawingml/2006/main" xmlns:r="http://schemas.openxmlformats.org/officeDocument/2006/relationships" xmlns:p="http://schemas.openxmlformats.org/presentationml/2006/main">
   <p:cSld>
     <p:spTree>
@@ -1863,7 +1867,7 @@
           <a:p>
             <a:fld id="{F7021451-1387-4CA6-816F-3879F97B5CBC}" type="slidenum">
               <a:rPr lang="en-US"/>
-              <a:t>6</a:t>
+              <a:t>23</a:t>
             </a:fld>
             <a:endParaRPr lang="en-US"/>
           </a:p>
@@ -1882,7 +1886,7 @@
 </p:notes>
 </file>
 
-<file path=ppt/notesSlides/notesSlide7.xml><?xml version="1.0" encoding="utf-8"?>
+<file path=ppt/notesSlides/notesSlide3.xml><?xml version="1.0" encoding="utf-8"?>
 <p:notes xmlns:a="http://schemas.openxmlformats.org/drawingml/2006/main" xmlns:r="http://schemas.openxmlformats.org/officeDocument/2006/relationships" xmlns:p="http://schemas.openxmlformats.org/presentationml/2006/main">
   <p:cSld>
     <p:spTree>
@@ -1951,7 +1955,7 @@
           <a:p>
             <a:fld id="{F7021451-1387-4CA6-816F-3879F97B5CBC}" type="slidenum">
               <a:rPr lang="en-US"/>
-              <a:t>7</a:t>
+              <a:t>3</a:t>
             </a:fld>
             <a:endParaRPr lang="en-US"/>
           </a:p>
@@ -1970,6 +1974,358 @@
 </p:notes>
 </file>
 
+<file path=ppt/notesSlides/notesSlide4.xml><?xml version="1.0" encoding="utf-8"?>
+<p:notes xmlns:a="http://schemas.openxmlformats.org/drawingml/2006/main" xmlns:r="http://schemas.openxmlformats.org/officeDocument/2006/relationships" xmlns:p="http://schemas.openxmlformats.org/presentationml/2006/main">
+  <p:cSld>
+    <p:spTree>
+      <p:nvGrpSpPr>
+        <p:cNvPr id="1" name=""/>
+        <p:cNvGrpSpPr/>
+        <p:nvPr/>
+      </p:nvGrpSpPr>
+      <p:grpSpPr>
+        <a:xfrm>
+          <a:off x="0" y="0"/>
+          <a:ext cx="0" cy="0"/>
+          <a:chOff x="0" y="0"/>
+          <a:chExt cx="0" cy="0"/>
+        </a:xfrm>
+      </p:grpSpPr>
+      <p:sp>
+        <p:nvSpPr>
+          <p:cNvPr id="2" name="Slide Image Placeholder 1"/>
+          <p:cNvSpPr>
+            <a:spLocks noGrp="1" noRot="1" noChangeAspect="1"/>
+          </p:cNvSpPr>
+          <p:nvPr>
+            <p:ph type="sldImg"/>
+          </p:nvPr>
+        </p:nvSpPr>
+        <p:spPr/>
+      </p:sp>
+      <p:sp>
+        <p:nvSpPr>
+          <p:cNvPr id="3" name="Notes Placeholder 2"/>
+          <p:cNvSpPr>
+            <a:spLocks noGrp="1"/>
+          </p:cNvSpPr>
+          <p:nvPr>
+            <p:ph type="body" idx="1"/>
+          </p:nvPr>
+        </p:nvSpPr>
+        <p:spPr/>
+        <p:txBody>
+          <a:bodyPr/>
+          <a:lstStyle/>
+          <a:p>
+            <a:r>
+              <a:rPr lang="en-US" dirty="0"/>
+              <a:t/>
+            </a:r>
+            <a:endParaRPr lang="en-US" dirty="0"/>
+          </a:p>
+        </p:txBody>
+      </p:sp>
+      <p:sp>
+        <p:nvSpPr>
+          <p:cNvPr id="4" name="Slide Number Placeholder 3"/>
+          <p:cNvSpPr>
+            <a:spLocks noGrp="1"/>
+          </p:cNvSpPr>
+          <p:nvPr>
+            <p:ph type="sldNum" sz="quarter" idx="10"/>
+          </p:nvPr>
+        </p:nvSpPr>
+        <p:spPr/>
+        <p:txBody>
+          <a:bodyPr/>
+          <a:lstStyle/>
+          <a:p>
+            <a:fld id="{F7021451-1387-4CA6-816F-3879F97B5CBC}" type="slidenum">
+              <a:rPr lang="en-US"/>
+              <a:t>4</a:t>
+            </a:fld>
+            <a:endParaRPr lang="en-US"/>
+          </a:p>
+        </p:txBody>
+      </p:sp>
+    </p:spTree>
+    <p:extLst>
+      <p:ext uri="{BB962C8B-B14F-4D97-AF65-F5344CB8AC3E}">
+        <p14:creationId xmlns:p14="http://schemas.microsoft.com/office/powerpoint/2010/main" val="1024086991"/>
+      </p:ext>
+    </p:extLst>
+  </p:cSld>
+  <p:clrMapOvr>
+    <a:masterClrMapping/>
+  </p:clrMapOvr>
+</p:notes>
+</file>
+
+<file path=ppt/notesSlides/notesSlide5.xml><?xml version="1.0" encoding="utf-8"?>
+<p:notes xmlns:a="http://schemas.openxmlformats.org/drawingml/2006/main" xmlns:r="http://schemas.openxmlformats.org/officeDocument/2006/relationships" xmlns:p="http://schemas.openxmlformats.org/presentationml/2006/main">
+  <p:cSld>
+    <p:spTree>
+      <p:nvGrpSpPr>
+        <p:cNvPr id="1" name=""/>
+        <p:cNvGrpSpPr/>
+        <p:nvPr/>
+      </p:nvGrpSpPr>
+      <p:grpSpPr>
+        <a:xfrm>
+          <a:off x="0" y="0"/>
+          <a:ext cx="0" cy="0"/>
+          <a:chOff x="0" y="0"/>
+          <a:chExt cx="0" cy="0"/>
+        </a:xfrm>
+      </p:grpSpPr>
+      <p:sp>
+        <p:nvSpPr>
+          <p:cNvPr id="2" name="Slide Image Placeholder 1"/>
+          <p:cNvSpPr>
+            <a:spLocks noGrp="1" noRot="1" noChangeAspect="1"/>
+          </p:cNvSpPr>
+          <p:nvPr>
+            <p:ph type="sldImg"/>
+          </p:nvPr>
+        </p:nvSpPr>
+        <p:spPr/>
+      </p:sp>
+      <p:sp>
+        <p:nvSpPr>
+          <p:cNvPr id="3" name="Notes Placeholder 2"/>
+          <p:cNvSpPr>
+            <a:spLocks noGrp="1"/>
+          </p:cNvSpPr>
+          <p:nvPr>
+            <p:ph type="body" idx="1"/>
+          </p:nvPr>
+        </p:nvSpPr>
+        <p:spPr/>
+        <p:txBody>
+          <a:bodyPr/>
+          <a:lstStyle/>
+          <a:p>
+            <a:r>
+              <a:rPr lang="en-US" dirty="0"/>
+              <a:t/>
+            </a:r>
+            <a:endParaRPr lang="en-US" dirty="0"/>
+          </a:p>
+        </p:txBody>
+      </p:sp>
+      <p:sp>
+        <p:nvSpPr>
+          <p:cNvPr id="4" name="Slide Number Placeholder 3"/>
+          <p:cNvSpPr>
+            <a:spLocks noGrp="1"/>
+          </p:cNvSpPr>
+          <p:nvPr>
+            <p:ph type="sldNum" sz="quarter" idx="10"/>
+          </p:nvPr>
+        </p:nvSpPr>
+        <p:spPr/>
+        <p:txBody>
+          <a:bodyPr/>
+          <a:lstStyle/>
+          <a:p>
+            <a:fld id="{F7021451-1387-4CA6-816F-3879F97B5CBC}" type="slidenum">
+              <a:rPr lang="en-US"/>
+              <a:t>5</a:t>
+            </a:fld>
+            <a:endParaRPr lang="en-US"/>
+          </a:p>
+        </p:txBody>
+      </p:sp>
+    </p:spTree>
+    <p:extLst>
+      <p:ext uri="{BB962C8B-B14F-4D97-AF65-F5344CB8AC3E}">
+        <p14:creationId xmlns:p14="http://schemas.microsoft.com/office/powerpoint/2010/main" val="1024086991"/>
+      </p:ext>
+    </p:extLst>
+  </p:cSld>
+  <p:clrMapOvr>
+    <a:masterClrMapping/>
+  </p:clrMapOvr>
+</p:notes>
+</file>
+
+<file path=ppt/notesSlides/notesSlide6.xml><?xml version="1.0" encoding="utf-8"?>
+<p:notes xmlns:a="http://schemas.openxmlformats.org/drawingml/2006/main" xmlns:r="http://schemas.openxmlformats.org/officeDocument/2006/relationships" xmlns:p="http://schemas.openxmlformats.org/presentationml/2006/main">
+  <p:cSld>
+    <p:spTree>
+      <p:nvGrpSpPr>
+        <p:cNvPr id="1" name=""/>
+        <p:cNvGrpSpPr/>
+        <p:nvPr/>
+      </p:nvGrpSpPr>
+      <p:grpSpPr>
+        <a:xfrm>
+          <a:off x="0" y="0"/>
+          <a:ext cx="0" cy="0"/>
+          <a:chOff x="0" y="0"/>
+          <a:chExt cx="0" cy="0"/>
+        </a:xfrm>
+      </p:grpSpPr>
+      <p:sp>
+        <p:nvSpPr>
+          <p:cNvPr id="2" name="Slide Image Placeholder 1"/>
+          <p:cNvSpPr>
+            <a:spLocks noGrp="1" noRot="1" noChangeAspect="1"/>
+          </p:cNvSpPr>
+          <p:nvPr>
+            <p:ph type="sldImg"/>
+          </p:nvPr>
+        </p:nvSpPr>
+        <p:spPr/>
+      </p:sp>
+      <p:sp>
+        <p:nvSpPr>
+          <p:cNvPr id="3" name="Notes Placeholder 2"/>
+          <p:cNvSpPr>
+            <a:spLocks noGrp="1"/>
+          </p:cNvSpPr>
+          <p:nvPr>
+            <p:ph type="body" idx="1"/>
+          </p:nvPr>
+        </p:nvSpPr>
+        <p:spPr/>
+        <p:txBody>
+          <a:bodyPr/>
+          <a:lstStyle/>
+          <a:p>
+            <a:r>
+              <a:rPr lang="en-US" dirty="0"/>
+              <a:t/>
+            </a:r>
+            <a:endParaRPr lang="en-US" dirty="0"/>
+          </a:p>
+        </p:txBody>
+      </p:sp>
+      <p:sp>
+        <p:nvSpPr>
+          <p:cNvPr id="4" name="Slide Number Placeholder 3"/>
+          <p:cNvSpPr>
+            <a:spLocks noGrp="1"/>
+          </p:cNvSpPr>
+          <p:nvPr>
+            <p:ph type="sldNum" sz="quarter" idx="10"/>
+          </p:nvPr>
+        </p:nvSpPr>
+        <p:spPr/>
+        <p:txBody>
+          <a:bodyPr/>
+          <a:lstStyle/>
+          <a:p>
+            <a:fld id="{F7021451-1387-4CA6-816F-3879F97B5CBC}" type="slidenum">
+              <a:rPr lang="en-US"/>
+              <a:t>6</a:t>
+            </a:fld>
+            <a:endParaRPr lang="en-US"/>
+          </a:p>
+        </p:txBody>
+      </p:sp>
+    </p:spTree>
+    <p:extLst>
+      <p:ext uri="{BB962C8B-B14F-4D97-AF65-F5344CB8AC3E}">
+        <p14:creationId xmlns:p14="http://schemas.microsoft.com/office/powerpoint/2010/main" val="1024086991"/>
+      </p:ext>
+    </p:extLst>
+  </p:cSld>
+  <p:clrMapOvr>
+    <a:masterClrMapping/>
+  </p:clrMapOvr>
+</p:notes>
+</file>
+
+<file path=ppt/notesSlides/notesSlide7.xml><?xml version="1.0" encoding="utf-8"?>
+<p:notes xmlns:a="http://schemas.openxmlformats.org/drawingml/2006/main" xmlns:r="http://schemas.openxmlformats.org/officeDocument/2006/relationships" xmlns:p="http://schemas.openxmlformats.org/presentationml/2006/main">
+  <p:cSld>
+    <p:spTree>
+      <p:nvGrpSpPr>
+        <p:cNvPr id="1" name=""/>
+        <p:cNvGrpSpPr/>
+        <p:nvPr/>
+      </p:nvGrpSpPr>
+      <p:grpSpPr>
+        <a:xfrm>
+          <a:off x="0" y="0"/>
+          <a:ext cx="0" cy="0"/>
+          <a:chOff x="0" y="0"/>
+          <a:chExt cx="0" cy="0"/>
+        </a:xfrm>
+      </p:grpSpPr>
+      <p:sp>
+        <p:nvSpPr>
+          <p:cNvPr id="2" name="Slide Image Placeholder 1"/>
+          <p:cNvSpPr>
+            <a:spLocks noGrp="1" noRot="1" noChangeAspect="1"/>
+          </p:cNvSpPr>
+          <p:nvPr>
+            <p:ph type="sldImg"/>
+          </p:nvPr>
+        </p:nvSpPr>
+        <p:spPr/>
+      </p:sp>
+      <p:sp>
+        <p:nvSpPr>
+          <p:cNvPr id="3" name="Notes Placeholder 2"/>
+          <p:cNvSpPr>
+            <a:spLocks noGrp="1"/>
+          </p:cNvSpPr>
+          <p:nvPr>
+            <p:ph type="body" idx="1"/>
+          </p:nvPr>
+        </p:nvSpPr>
+        <p:spPr/>
+        <p:txBody>
+          <a:bodyPr/>
+          <a:lstStyle/>
+          <a:p>
+            <a:r>
+              <a:rPr lang="en-US" dirty="0"/>
+              <a:t/>
+            </a:r>
+            <a:endParaRPr lang="en-US" dirty="0"/>
+          </a:p>
+        </p:txBody>
+      </p:sp>
+      <p:sp>
+        <p:nvSpPr>
+          <p:cNvPr id="4" name="Slide Number Placeholder 3"/>
+          <p:cNvSpPr>
+            <a:spLocks noGrp="1"/>
+          </p:cNvSpPr>
+          <p:nvPr>
+            <p:ph type="sldNum" sz="quarter" idx="10"/>
+          </p:nvPr>
+        </p:nvSpPr>
+        <p:spPr/>
+        <p:txBody>
+          <a:bodyPr/>
+          <a:lstStyle/>
+          <a:p>
+            <a:fld id="{F7021451-1387-4CA6-816F-3879F97B5CBC}" type="slidenum">
+              <a:rPr lang="en-US"/>
+              <a:t>7</a:t>
+            </a:fld>
+            <a:endParaRPr lang="en-US"/>
+          </a:p>
+        </p:txBody>
+      </p:sp>
+    </p:spTree>
+    <p:extLst>
+      <p:ext uri="{BB962C8B-B14F-4D97-AF65-F5344CB8AC3E}">
+        <p14:creationId xmlns:p14="http://schemas.microsoft.com/office/powerpoint/2010/main" val="1024086991"/>
+      </p:ext>
+    </p:extLst>
+  </p:cSld>
+  <p:clrMapOvr>
+    <a:masterClrMapping/>
+  </p:clrMapOvr>
+</p:notes>
+</file>
+
 <file path=ppt/notesSlides/notesSlide8.xml><?xml version="1.0" encoding="utf-8"?>
 <p:notes xmlns:a="http://schemas.openxmlformats.org/drawingml/2006/main" xmlns:r="http://schemas.openxmlformats.org/officeDocument/2006/relationships" xmlns:p="http://schemas.openxmlformats.org/presentationml/2006/main">
   <p:cSld>
@@ -2016,15 +2372,7 @@
           <a:p>
             <a:r>
               <a:rPr lang="en-US" dirty="0"/>
-              <a:t>FIGURA A PRODUZIR (nota do apresentador — não aparece no slide)
-Objetivo didático:
-Mostrar a estrutura do padrão State: interface IState, classes concretas de estado e o contexto (FSM) que mantém a referência ao estado ativo.
-Arquivo sugerido:
-assets/mermaid-1.png (substituir o diagrama atual, que ilustra os superestados da antiga Semana 3 — não usado mais nesta oferta)
-Descrição:
-Diagrama com uma interface IState no topo, três classes concretas apontando para ela (PatrulharState, AtacarState, FugirState) e uma classe FsmContext com uma seta para o estado ativo, indicando a delegação de Enter/Update/Exit.
-Como produzir:
-Gerar via Mermaid (classDiagram) e exportar como PNG, seguindo o padrão dos demais diagramas do curso.</a:t>
+              <a:t/>
             </a:r>
             <a:endParaRPr lang="en-US" dirty="0"/>
           </a:p>
@@ -2893,6 +3241,162 @@
 <file path=ppt/slides/slide2.xml><?xml version="1.0" encoding="utf-8"?>
 <p:sld xmlns:a="http://schemas.openxmlformats.org/drawingml/2006/main" xmlns:r="http://schemas.openxmlformats.org/officeDocument/2006/relationships" xmlns:p="http://schemas.openxmlformats.org/presentationml/2006/main">
   <p:cSld name="Slide 2">
+    <p:bg>
+      <p:bgPr>
+        <a:blipFill dpi="0" rotWithShape="1">
+          <a:blip r:embed="rId1">
+            <a:lum/>
+          </a:blip>
+          <a:srcRect/>
+          <a:stretch>
+            <a:fillRect/>
+          </a:stretch>
+        </a:blipFill>
+        <a:effectLst/>
+      </p:bgPr>
+    </p:bg>
+    <p:spTree>
+      <p:nvGrpSpPr>
+        <p:cNvPr id="1" name=""/>
+        <p:cNvGrpSpPr/>
+        <p:nvPr/>
+      </p:nvGrpSpPr>
+      <p:grpSpPr>
+        <a:xfrm>
+          <a:off x="0" y="0"/>
+          <a:ext cx="0" cy="0"/>
+          <a:chOff x="0" y="0"/>
+          <a:chExt cx="0" cy="0"/>
+        </a:xfrm>
+      </p:grpSpPr>
+    </p:spTree>
+  </p:cSld>
+  <p:clrMapOvr>
+    <a:masterClrMapping/>
+  </p:clrMapOvr>
+</p:sld>
+</file>
+
+<file path=ppt/slides/slide20.xml><?xml version="1.0" encoding="utf-8"?>
+<p:sld xmlns:a="http://schemas.openxmlformats.org/drawingml/2006/main" xmlns:r="http://schemas.openxmlformats.org/officeDocument/2006/relationships" xmlns:p="http://schemas.openxmlformats.org/presentationml/2006/main">
+  <p:cSld name="Slide 20">
+    <p:bg>
+      <p:bgPr>
+        <a:blipFill dpi="0" rotWithShape="1">
+          <a:blip r:embed="rId1">
+            <a:lum/>
+          </a:blip>
+          <a:srcRect/>
+          <a:stretch>
+            <a:fillRect/>
+          </a:stretch>
+        </a:blipFill>
+        <a:effectLst/>
+      </p:bgPr>
+    </p:bg>
+    <p:spTree>
+      <p:nvGrpSpPr>
+        <p:cNvPr id="1" name=""/>
+        <p:cNvGrpSpPr/>
+        <p:nvPr/>
+      </p:nvGrpSpPr>
+      <p:grpSpPr>
+        <a:xfrm>
+          <a:off x="0" y="0"/>
+          <a:ext cx="0" cy="0"/>
+          <a:chOff x="0" y="0"/>
+          <a:chExt cx="0" cy="0"/>
+        </a:xfrm>
+      </p:grpSpPr>
+    </p:spTree>
+  </p:cSld>
+  <p:clrMapOvr>
+    <a:masterClrMapping/>
+  </p:clrMapOvr>
+</p:sld>
+</file>
+
+<file path=ppt/slides/slide21.xml><?xml version="1.0" encoding="utf-8"?>
+<p:sld xmlns:a="http://schemas.openxmlformats.org/drawingml/2006/main" xmlns:r="http://schemas.openxmlformats.org/officeDocument/2006/relationships" xmlns:p="http://schemas.openxmlformats.org/presentationml/2006/main">
+  <p:cSld name="Slide 21">
+    <p:bg>
+      <p:bgPr>
+        <a:blipFill dpi="0" rotWithShape="1">
+          <a:blip r:embed="rId1">
+            <a:lum/>
+          </a:blip>
+          <a:srcRect/>
+          <a:stretch>
+            <a:fillRect/>
+          </a:stretch>
+        </a:blipFill>
+        <a:effectLst/>
+      </p:bgPr>
+    </p:bg>
+    <p:spTree>
+      <p:nvGrpSpPr>
+        <p:cNvPr id="1" name=""/>
+        <p:cNvGrpSpPr/>
+        <p:nvPr/>
+      </p:nvGrpSpPr>
+      <p:grpSpPr>
+        <a:xfrm>
+          <a:off x="0" y="0"/>
+          <a:ext cx="0" cy="0"/>
+          <a:chOff x="0" y="0"/>
+          <a:chExt cx="0" cy="0"/>
+        </a:xfrm>
+      </p:grpSpPr>
+    </p:spTree>
+  </p:cSld>
+  <p:clrMapOvr>
+    <a:masterClrMapping/>
+  </p:clrMapOvr>
+</p:sld>
+</file>
+
+<file path=ppt/slides/slide22.xml><?xml version="1.0" encoding="utf-8"?>
+<p:sld xmlns:a="http://schemas.openxmlformats.org/drawingml/2006/main" xmlns:r="http://schemas.openxmlformats.org/officeDocument/2006/relationships" xmlns:p="http://schemas.openxmlformats.org/presentationml/2006/main">
+  <p:cSld name="Slide 22">
+    <p:bg>
+      <p:bgPr>
+        <a:blipFill dpi="0" rotWithShape="1">
+          <a:blip r:embed="rId1">
+            <a:lum/>
+          </a:blip>
+          <a:srcRect/>
+          <a:stretch>
+            <a:fillRect/>
+          </a:stretch>
+        </a:blipFill>
+        <a:effectLst/>
+      </p:bgPr>
+    </p:bg>
+    <p:spTree>
+      <p:nvGrpSpPr>
+        <p:cNvPr id="1" name=""/>
+        <p:cNvGrpSpPr/>
+        <p:nvPr/>
+      </p:nvGrpSpPr>
+      <p:grpSpPr>
+        <a:xfrm>
+          <a:off x="0" y="0"/>
+          <a:ext cx="0" cy="0"/>
+          <a:chOff x="0" y="0"/>
+          <a:chExt cx="0" cy="0"/>
+        </a:xfrm>
+      </p:grpSpPr>
+    </p:spTree>
+  </p:cSld>
+  <p:clrMapOvr>
+    <a:masterClrMapping/>
+  </p:clrMapOvr>
+</p:sld>
+</file>
+
+<file path=ppt/slides/slide23.xml><?xml version="1.0" encoding="utf-8"?>
+<p:sld xmlns:a="http://schemas.openxmlformats.org/drawingml/2006/main" xmlns:r="http://schemas.openxmlformats.org/officeDocument/2006/relationships" xmlns:p="http://schemas.openxmlformats.org/presentationml/2006/main">
+  <p:cSld name="Slide 23">
     <p:bg>
       <p:bgPr>
         <a:blipFill dpi="0" rotWithShape="1">
